--- a/Reporte 290526.pptx
+++ b/Reporte 290526.pptx
@@ -5,7 +5,7 @@
     <p:sldMasterId id="2147483672" r:id="rId1"/>
   </p:sldMasterIdLst>
   <p:notesMasterIdLst>
-    <p:notesMasterId r:id="rId18"/>
+    <p:notesMasterId r:id="rId17"/>
   </p:notesMasterIdLst>
   <p:sldIdLst>
     <p:sldId id="350" r:id="rId2"/>
@@ -15,31 +15,30 @@
     <p:sldId id="378" r:id="rId6"/>
     <p:sldId id="394" r:id="rId7"/>
     <p:sldId id="395" r:id="rId8"/>
-    <p:sldId id="398" r:id="rId9"/>
-    <p:sldId id="396" r:id="rId10"/>
-    <p:sldId id="388" r:id="rId11"/>
-    <p:sldId id="351" r:id="rId12"/>
-    <p:sldId id="369" r:id="rId13"/>
-    <p:sldId id="361" r:id="rId14"/>
-    <p:sldId id="371" r:id="rId15"/>
-    <p:sldId id="384" r:id="rId16"/>
-    <p:sldId id="280" r:id="rId17"/>
+    <p:sldId id="396" r:id="rId9"/>
+    <p:sldId id="388" r:id="rId10"/>
+    <p:sldId id="351" r:id="rId11"/>
+    <p:sldId id="369" r:id="rId12"/>
+    <p:sldId id="361" r:id="rId13"/>
+    <p:sldId id="371" r:id="rId14"/>
+    <p:sldId id="384" r:id="rId15"/>
+    <p:sldId id="280" r:id="rId16"/>
   </p:sldIdLst>
   <p:sldSz cx="9144000" cy="5143500" type="screen16x9"/>
   <p:notesSz cx="6858000" cy="9144000"/>
   <p:embeddedFontLst>
     <p:embeddedFont>
-      <p:font typeface="Montserrat" pitchFamily="2" charset="0"/>
-      <p:regular r:id="rId19"/>
-      <p:bold r:id="rId20"/>
-      <p:italic r:id="rId21"/>
-      <p:boldItalic r:id="rId22"/>
+      <p:font typeface="Montserrat" panose="00000500000000000000" pitchFamily="2" charset="0"/>
+      <p:regular r:id="rId18"/>
+      <p:bold r:id="rId19"/>
+      <p:italic r:id="rId20"/>
+      <p:boldItalic r:id="rId21"/>
     </p:embeddedFont>
     <p:embeddedFont>
-      <p:font typeface="Montserrat Black" pitchFamily="2" charset="0"/>
-      <p:bold r:id="rId23"/>
-      <p:italic r:id="rId24"/>
-      <p:boldItalic r:id="rId25"/>
+      <p:font typeface="Montserrat Black" panose="00000A00000000000000" pitchFamily="2" charset="0"/>
+      <p:bold r:id="rId22"/>
+      <p:italic r:id="rId23"/>
+      <p:boldItalic r:id="rId24"/>
     </p:embeddedFont>
   </p:embeddedFontLst>
   <p:defaultTextStyle>
@@ -6242,110 +6241,6 @@
   <p:cSld>
     <p:spTree>
       <p:nvGrpSpPr>
-        <p:cNvPr id="1" name="Shape 108">
-          <a:extLst>
-            <a:ext uri="{FF2B5EF4-FFF2-40B4-BE49-F238E27FC236}">
-              <a16:creationId xmlns:a16="http://schemas.microsoft.com/office/drawing/2014/main" id="{3AB59246-6522-404E-9FEB-F1E85E07D6CC}"/>
-            </a:ext>
-          </a:extLst>
-        </p:cNvPr>
-        <p:cNvGrpSpPr/>
-        <p:nvPr/>
-      </p:nvGrpSpPr>
-      <p:grpSpPr>
-        <a:xfrm>
-          <a:off x="0" y="0"/>
-          <a:ext cx="0" cy="0"/>
-          <a:chOff x="0" y="0"/>
-          <a:chExt cx="0" cy="0"/>
-        </a:xfrm>
-      </p:grpSpPr>
-      <p:sp>
-        <p:nvSpPr>
-          <p:cNvPr id="2" name="CuadroTexto 1">
-            <a:extLst>
-              <a:ext uri="{FF2B5EF4-FFF2-40B4-BE49-F238E27FC236}">
-                <a16:creationId xmlns:a16="http://schemas.microsoft.com/office/drawing/2014/main" id="{AE07F171-51E8-E8F4-27C7-0CA3B7A8A997}"/>
-              </a:ext>
-            </a:extLst>
-          </p:cNvPr>
-          <p:cNvSpPr txBox="1"/>
-          <p:nvPr/>
-        </p:nvSpPr>
-        <p:spPr>
-          <a:xfrm>
-            <a:off x="1183340" y="0"/>
-            <a:ext cx="6763871" cy="369332"/>
-          </a:xfrm>
-          <a:prstGeom prst="rect">
-            <a:avLst/>
-          </a:prstGeom>
-          <a:noFill/>
-        </p:spPr>
-        <p:txBody>
-          <a:bodyPr wrap="square" rtlCol="0">
-            <a:spAutoFit/>
-          </a:bodyPr>
-          <a:lstStyle/>
-          <a:p>
-            <a:pPr algn="ctr"/>
-            <a:r>
-              <a:rPr lang="es-MX" sz="1800" b="1" dirty="0">
-                <a:latin typeface="Montserrat" panose="00000500000000000000" pitchFamily="2" charset="0"/>
-              </a:rPr>
-              <a:t>Información de gobierno en radiodifusoras</a:t>
-            </a:r>
-          </a:p>
-        </p:txBody>
-      </p:sp>
-      <p:pic>
-        <p:nvPicPr>
-          <p:cNvPr id="5" name="Imagen 4">
-            <a:extLst>
-              <a:ext uri="{FF2B5EF4-FFF2-40B4-BE49-F238E27FC236}">
-                <a16:creationId xmlns:a16="http://schemas.microsoft.com/office/drawing/2014/main" id="{3696A835-FB14-EC1D-1CA2-1DEDEB19EE90}"/>
-              </a:ext>
-            </a:extLst>
-          </p:cNvPr>
-          <p:cNvPicPr>
-            <a:picLocks noChangeAspect="1"/>
-          </p:cNvPicPr>
-          <p:nvPr/>
-        </p:nvPicPr>
-        <p:blipFill>
-          <a:blip r:embed="rId3"/>
-          <a:stretch>
-            <a:fillRect/>
-          </a:stretch>
-        </p:blipFill>
-        <p:spPr>
-          <a:xfrm>
-            <a:off x="0" y="683759"/>
-            <a:ext cx="9144000" cy="3918857"/>
-          </a:xfrm>
-          <a:prstGeom prst="rect">
-            <a:avLst/>
-          </a:prstGeom>
-        </p:spPr>
-      </p:pic>
-    </p:spTree>
-    <p:extLst>
-      <p:ext uri="{BB962C8B-B14F-4D97-AF65-F5344CB8AC3E}">
-        <p14:creationId xmlns:p14="http://schemas.microsoft.com/office/powerpoint/2010/main" val="3295811942"/>
-      </p:ext>
-    </p:extLst>
-  </p:cSld>
-  <p:clrMapOvr>
-    <a:masterClrMapping/>
-  </p:clrMapOvr>
-</p:sld>
-</file>
-
-<file path=ppt/slides/slide11.xml><?xml version="1.0" encoding="utf-8"?>
-<p:sld xmlns:a="http://schemas.openxmlformats.org/drawingml/2006/main" xmlns:r="http://schemas.openxmlformats.org/officeDocument/2006/relationships" xmlns:p="http://schemas.openxmlformats.org/presentationml/2006/main">
-  <p:cSld>
-    <p:spTree>
-      <p:nvGrpSpPr>
         <p:cNvPr id="1" name=""/>
         <p:cNvGrpSpPr/>
         <p:nvPr/>
@@ -6398,10 +6293,10 @@
       </p:sp>
       <p:pic>
         <p:nvPicPr>
-          <p:cNvPr id="4" name="Imagen 3">
+          <p:cNvPr id="3" name="Imagen 2">
             <a:extLst>
               <a:ext uri="{FF2B5EF4-FFF2-40B4-BE49-F238E27FC236}">
-                <a16:creationId xmlns:a16="http://schemas.microsoft.com/office/drawing/2014/main" id="{EEA6B458-720B-ECC7-DD46-AFD5E02D0D5C}"/>
+                <a16:creationId xmlns:a16="http://schemas.microsoft.com/office/drawing/2014/main" id="{39C6B1BD-149D-E0BE-1430-648658C12465}"/>
               </a:ext>
             </a:extLst>
           </p:cNvPr>
@@ -6418,8 +6313,8 @@
         </p:blipFill>
         <p:spPr>
           <a:xfrm>
-            <a:off x="0" y="1154630"/>
-            <a:ext cx="9144000" cy="2977116"/>
+            <a:off x="-6725" y="1348462"/>
+            <a:ext cx="9144000" cy="2589451"/>
           </a:xfrm>
           <a:prstGeom prst="rect">
             <a:avLst/>
@@ -6439,7 +6334,7 @@
 </p:sld>
 </file>
 
-<file path=ppt/slides/slide12.xml><?xml version="1.0" encoding="utf-8"?>
+<file path=ppt/slides/slide11.xml><?xml version="1.0" encoding="utf-8"?>
 <p:sld xmlns:a="http://schemas.openxmlformats.org/drawingml/2006/main" xmlns:r="http://schemas.openxmlformats.org/officeDocument/2006/relationships" xmlns:p="http://schemas.openxmlformats.org/presentationml/2006/main">
   <p:cSld>
     <p:spTree>
@@ -6502,10 +6397,10 @@
       </p:sp>
       <p:pic>
         <p:nvPicPr>
-          <p:cNvPr id="3" name="Imagen 2">
+          <p:cNvPr id="4" name="Imagen 3">
             <a:extLst>
               <a:ext uri="{FF2B5EF4-FFF2-40B4-BE49-F238E27FC236}">
-                <a16:creationId xmlns:a16="http://schemas.microsoft.com/office/drawing/2014/main" id="{AB2E4A9D-797C-B5F7-7C10-E690AFCE6405}"/>
+                <a16:creationId xmlns:a16="http://schemas.microsoft.com/office/drawing/2014/main" id="{85A63B61-19C3-6270-3957-A092F0B87D4E}"/>
               </a:ext>
             </a:extLst>
           </p:cNvPr>
@@ -6522,8 +6417,8 @@
         </p:blipFill>
         <p:spPr>
           <a:xfrm>
-            <a:off x="-6725" y="979021"/>
-            <a:ext cx="9144000" cy="3328334"/>
+            <a:off x="0" y="998747"/>
+            <a:ext cx="9144000" cy="3288881"/>
           </a:xfrm>
           <a:prstGeom prst="rect">
             <a:avLst/>
@@ -6543,7 +6438,7 @@
 </p:sld>
 </file>
 
-<file path=ppt/slides/slide13.xml><?xml version="1.0" encoding="utf-8"?>
+<file path=ppt/slides/slide12.xml><?xml version="1.0" encoding="utf-8"?>
 <p:sld xmlns:a="http://schemas.openxmlformats.org/drawingml/2006/main" xmlns:r="http://schemas.openxmlformats.org/officeDocument/2006/relationships" xmlns:p="http://schemas.openxmlformats.org/presentationml/2006/main">
   <p:cSld>
     <p:spTree>
@@ -6600,10 +6495,10 @@
       </p:sp>
       <p:pic>
         <p:nvPicPr>
-          <p:cNvPr id="5" name="Imagen 4">
+          <p:cNvPr id="4" name="Imagen 3">
             <a:extLst>
               <a:ext uri="{FF2B5EF4-FFF2-40B4-BE49-F238E27FC236}">
-                <a16:creationId xmlns:a16="http://schemas.microsoft.com/office/drawing/2014/main" id="{3CAF6DA4-66D9-69CC-85A0-21A11BC8B086}"/>
+                <a16:creationId xmlns:a16="http://schemas.microsoft.com/office/drawing/2014/main" id="{2FCA8D02-301B-9D98-B02A-DA17281DD61F}"/>
               </a:ext>
             </a:extLst>
           </p:cNvPr>
@@ -6620,8 +6515,8 @@
         </p:blipFill>
         <p:spPr>
           <a:xfrm>
-            <a:off x="0" y="1032585"/>
-            <a:ext cx="9144000" cy="3078329"/>
+            <a:off x="0" y="1261774"/>
+            <a:ext cx="9144000" cy="2762827"/>
           </a:xfrm>
           <a:prstGeom prst="rect">
             <a:avLst/>
@@ -6641,7 +6536,7 @@
 </p:sld>
 </file>
 
-<file path=ppt/slides/slide14.xml><?xml version="1.0" encoding="utf-8"?>
+<file path=ppt/slides/slide13.xml><?xml version="1.0" encoding="utf-8"?>
 <p:sld xmlns:a="http://schemas.openxmlformats.org/drawingml/2006/main" xmlns:r="http://schemas.openxmlformats.org/officeDocument/2006/relationships" xmlns:p="http://schemas.openxmlformats.org/presentationml/2006/main">
   <p:cSld>
     <p:spTree>
@@ -6698,10 +6593,10 @@
       </p:sp>
       <p:pic>
         <p:nvPicPr>
-          <p:cNvPr id="3" name="Imagen 2">
+          <p:cNvPr id="4" name="Imagen 3">
             <a:extLst>
               <a:ext uri="{FF2B5EF4-FFF2-40B4-BE49-F238E27FC236}">
-                <a16:creationId xmlns:a16="http://schemas.microsoft.com/office/drawing/2014/main" id="{604986A9-EDEF-DCB1-F396-98A3A6A6C42D}"/>
+                <a16:creationId xmlns:a16="http://schemas.microsoft.com/office/drawing/2014/main" id="{59D7E658-F0C1-5D0B-A444-DD43119661F2}"/>
               </a:ext>
             </a:extLst>
           </p:cNvPr>
@@ -6718,8 +6613,8 @@
         </p:blipFill>
         <p:spPr>
           <a:xfrm>
-            <a:off x="0" y="533629"/>
-            <a:ext cx="9144000" cy="4076241"/>
+            <a:off x="-1" y="703321"/>
+            <a:ext cx="9144000" cy="3879734"/>
           </a:xfrm>
           <a:prstGeom prst="rect">
             <a:avLst/>
@@ -6739,7 +6634,7 @@
 </p:sld>
 </file>
 
-<file path=ppt/slides/slide15.xml><?xml version="1.0" encoding="utf-8"?>
+<file path=ppt/slides/slide14.xml><?xml version="1.0" encoding="utf-8"?>
 <p:sld xmlns:a="http://schemas.openxmlformats.org/drawingml/2006/main" xmlns:r="http://schemas.openxmlformats.org/officeDocument/2006/relationships" xmlns:p="http://schemas.openxmlformats.org/presentationml/2006/main">
   <p:cSld>
     <p:spTree>
@@ -6796,10 +6691,10 @@
       </p:sp>
       <p:pic>
         <p:nvPicPr>
-          <p:cNvPr id="3" name="Imagen 2">
+          <p:cNvPr id="5" name="Imagen 4">
             <a:extLst>
               <a:ext uri="{FF2B5EF4-FFF2-40B4-BE49-F238E27FC236}">
-                <a16:creationId xmlns:a16="http://schemas.microsoft.com/office/drawing/2014/main" id="{A74A5930-A970-F491-7590-C5A371060EEC}"/>
+                <a16:creationId xmlns:a16="http://schemas.microsoft.com/office/drawing/2014/main" id="{8F57E3E3-FF83-1504-9B59-6C0A5859B06F}"/>
               </a:ext>
             </a:extLst>
           </p:cNvPr>
@@ -6816,8 +6711,8 @@
         </p:blipFill>
         <p:spPr>
           <a:xfrm>
-            <a:off x="1074102" y="280675"/>
-            <a:ext cx="6922771" cy="4862825"/>
+            <a:off x="0" y="1040168"/>
+            <a:ext cx="9144000" cy="3063164"/>
           </a:xfrm>
           <a:prstGeom prst="rect">
             <a:avLst/>
@@ -6837,7 +6732,7 @@
 </p:sld>
 </file>
 
-<file path=ppt/slides/slide16.xml><?xml version="1.0" encoding="utf-8"?>
+<file path=ppt/slides/slide15.xml><?xml version="1.0" encoding="utf-8"?>
 <p:sld xmlns:a="http://schemas.openxmlformats.org/drawingml/2006/main" xmlns:r="http://schemas.openxmlformats.org/officeDocument/2006/relationships" xmlns:p="http://schemas.openxmlformats.org/presentationml/2006/main">
   <p:cSld>
     <p:spTree>
@@ -6964,10 +6859,10 @@
       </p:sp>
       <p:pic>
         <p:nvPicPr>
-          <p:cNvPr id="3" name="Imagen 2">
+          <p:cNvPr id="4" name="Imagen 3">
             <a:extLst>
               <a:ext uri="{FF2B5EF4-FFF2-40B4-BE49-F238E27FC236}">
-                <a16:creationId xmlns:a16="http://schemas.microsoft.com/office/drawing/2014/main" id="{77922F3B-B2B5-D150-1BE4-D2B92A8E4DF0}"/>
+                <a16:creationId xmlns:a16="http://schemas.microsoft.com/office/drawing/2014/main" id="{809C4047-8F86-9ECB-CB34-03BAADAC7316}"/>
               </a:ext>
             </a:extLst>
           </p:cNvPr>
@@ -6984,8 +6879,8 @@
         </p:blipFill>
         <p:spPr>
           <a:xfrm>
-            <a:off x="0" y="947562"/>
-            <a:ext cx="9144000" cy="3391251"/>
+            <a:off x="0" y="863720"/>
+            <a:ext cx="9144000" cy="3416060"/>
           </a:xfrm>
           <a:prstGeom prst="rect">
             <a:avLst/>
@@ -7072,10 +6967,10 @@
       </p:sp>
       <p:pic>
         <p:nvPicPr>
-          <p:cNvPr id="4" name="Imagen 3">
+          <p:cNvPr id="3" name="Imagen 2">
             <a:extLst>
               <a:ext uri="{FF2B5EF4-FFF2-40B4-BE49-F238E27FC236}">
-                <a16:creationId xmlns:a16="http://schemas.microsoft.com/office/drawing/2014/main" id="{9CCF3EAF-ED5C-6EDC-BAD1-60B1797F174C}"/>
+                <a16:creationId xmlns:a16="http://schemas.microsoft.com/office/drawing/2014/main" id="{128BD6CC-A976-B1D2-7B70-FDDCB7B394E4}"/>
               </a:ext>
             </a:extLst>
           </p:cNvPr>
@@ -7092,8 +6987,8 @@
         </p:blipFill>
         <p:spPr>
           <a:xfrm>
-            <a:off x="0" y="1349901"/>
-            <a:ext cx="9144000" cy="2443698"/>
+            <a:off x="0" y="1422833"/>
+            <a:ext cx="9144000" cy="2440710"/>
           </a:xfrm>
           <a:prstGeom prst="rect">
             <a:avLst/>
@@ -7186,10 +7081,10 @@
       </p:sp>
       <p:pic>
         <p:nvPicPr>
-          <p:cNvPr id="3" name="Imagen 2">
+          <p:cNvPr id="2" name="Imagen 1">
             <a:extLst>
               <a:ext uri="{FF2B5EF4-FFF2-40B4-BE49-F238E27FC236}">
-                <a16:creationId xmlns:a16="http://schemas.microsoft.com/office/drawing/2014/main" id="{E7BE605F-A919-0A61-BB10-11A6EB8DD9B7}"/>
+                <a16:creationId xmlns:a16="http://schemas.microsoft.com/office/drawing/2014/main" id="{2271B8CB-D17A-A7CD-3882-28C7B24C55E8}"/>
               </a:ext>
             </a:extLst>
           </p:cNvPr>
@@ -7206,8 +7101,8 @@
         </p:blipFill>
         <p:spPr>
           <a:xfrm>
-            <a:off x="596028" y="657664"/>
-            <a:ext cx="7878920" cy="3971048"/>
+            <a:off x="355866" y="536620"/>
+            <a:ext cx="8359244" cy="4213136"/>
           </a:xfrm>
           <a:prstGeom prst="rect">
             <a:avLst/>
@@ -7290,10 +7185,10 @@
       </p:sp>
       <p:pic>
         <p:nvPicPr>
-          <p:cNvPr id="3" name="Imagen 2">
+          <p:cNvPr id="4" name="Imagen 3">
             <a:extLst>
               <a:ext uri="{FF2B5EF4-FFF2-40B4-BE49-F238E27FC236}">
-                <a16:creationId xmlns:a16="http://schemas.microsoft.com/office/drawing/2014/main" id="{7D98D21A-1F4B-B9FD-67E1-56A31EAAF7C1}"/>
+                <a16:creationId xmlns:a16="http://schemas.microsoft.com/office/drawing/2014/main" id="{351F025B-D0A5-C757-03A4-AEAFADD4FACB}"/>
               </a:ext>
             </a:extLst>
           </p:cNvPr>
@@ -7310,8 +7205,8 @@
         </p:blipFill>
         <p:spPr>
           <a:xfrm>
-            <a:off x="599520" y="885589"/>
-            <a:ext cx="7944959" cy="3372321"/>
+            <a:off x="1771259" y="1747722"/>
+            <a:ext cx="5601482" cy="1648055"/>
           </a:xfrm>
           <a:prstGeom prst="rect">
             <a:avLst/>
@@ -7404,10 +7299,10 @@
       </p:sp>
       <p:pic>
         <p:nvPicPr>
-          <p:cNvPr id="3" name="Imagen 2">
+          <p:cNvPr id="4" name="Imagen 3">
             <a:extLst>
               <a:ext uri="{FF2B5EF4-FFF2-40B4-BE49-F238E27FC236}">
-                <a16:creationId xmlns:a16="http://schemas.microsoft.com/office/drawing/2014/main" id="{CDC0565A-8D0A-9CFA-4A9A-605B0B5A6C55}"/>
+                <a16:creationId xmlns:a16="http://schemas.microsoft.com/office/drawing/2014/main" id="{DE9F82EA-30D3-921E-A05C-66A5B8EA8D30}"/>
               </a:ext>
             </a:extLst>
           </p:cNvPr>
@@ -7424,8 +7319,8 @@
         </p:blipFill>
         <p:spPr>
           <a:xfrm>
-            <a:off x="0" y="947003"/>
-            <a:ext cx="9144000" cy="3392369"/>
+            <a:off x="0" y="869909"/>
+            <a:ext cx="9144000" cy="3403682"/>
           </a:xfrm>
           <a:prstGeom prst="rect">
             <a:avLst/>
@@ -7518,10 +7413,10 @@
       </p:sp>
       <p:pic>
         <p:nvPicPr>
-          <p:cNvPr id="2" name="Imagen 1">
+          <p:cNvPr id="3" name="Imagen 2">
             <a:extLst>
               <a:ext uri="{FF2B5EF4-FFF2-40B4-BE49-F238E27FC236}">
-                <a16:creationId xmlns:a16="http://schemas.microsoft.com/office/drawing/2014/main" id="{6EF02DCC-5BAC-5803-2466-31A3D0E405C1}"/>
+                <a16:creationId xmlns:a16="http://schemas.microsoft.com/office/drawing/2014/main" id="{5006F397-5FC3-7307-50F9-5FFF1482D8E8}"/>
               </a:ext>
             </a:extLst>
           </p:cNvPr>
@@ -7538,8 +7433,38 @@
         </p:blipFill>
         <p:spPr>
           <a:xfrm>
-            <a:off x="1143000" y="809752"/>
-            <a:ext cx="6858000" cy="3456495"/>
+            <a:off x="0" y="914940"/>
+            <a:ext cx="4535488" cy="3456495"/>
+          </a:xfrm>
+          <a:prstGeom prst="rect">
+            <a:avLst/>
+          </a:prstGeom>
+        </p:spPr>
+      </p:pic>
+      <p:pic>
+        <p:nvPicPr>
+          <p:cNvPr id="4" name="Imagen 3">
+            <a:extLst>
+              <a:ext uri="{FF2B5EF4-FFF2-40B4-BE49-F238E27FC236}">
+                <a16:creationId xmlns:a16="http://schemas.microsoft.com/office/drawing/2014/main" id="{138A6E4A-8790-C699-7570-6496A52122E8}"/>
+              </a:ext>
+            </a:extLst>
+          </p:cNvPr>
+          <p:cNvPicPr>
+            <a:picLocks noChangeAspect="1"/>
+          </p:cNvPicPr>
+          <p:nvPr/>
+        </p:nvPicPr>
+        <p:blipFill>
+          <a:blip r:embed="rId3"/>
+          <a:stretch>
+            <a:fillRect/>
+          </a:stretch>
+        </p:blipFill>
+        <p:spPr>
+          <a:xfrm>
+            <a:off x="4608512" y="914940"/>
+            <a:ext cx="4535488" cy="3456495"/>
           </a:xfrm>
           <a:prstGeom prst="rect">
             <a:avLst/>
@@ -7560,120 +7485,6 @@
 </file>
 
 <file path=ppt/slides/slide8.xml><?xml version="1.0" encoding="utf-8"?>
-<p:sld xmlns:a="http://schemas.openxmlformats.org/drawingml/2006/main" xmlns:r="http://schemas.openxmlformats.org/officeDocument/2006/relationships" xmlns:p="http://schemas.openxmlformats.org/presentationml/2006/main">
-  <p:cSld>
-    <p:bg>
-      <p:bgPr>
-        <a:solidFill>
-          <a:srgbClr val="F4F6F8"/>
-        </a:solidFill>
-        <a:effectLst/>
-      </p:bgPr>
-    </p:bg>
-    <p:spTree>
-      <p:nvGrpSpPr>
-        <p:cNvPr id="1" name="">
-          <a:extLst>
-            <a:ext uri="{FF2B5EF4-FFF2-40B4-BE49-F238E27FC236}">
-              <a16:creationId xmlns:a16="http://schemas.microsoft.com/office/drawing/2014/main" id="{4B7584ED-2DC3-D0E5-87FA-871BE6FA85A6}"/>
-            </a:ext>
-          </a:extLst>
-        </p:cNvPr>
-        <p:cNvGrpSpPr/>
-        <p:nvPr/>
-      </p:nvGrpSpPr>
-      <p:grpSpPr>
-        <a:xfrm>
-          <a:off x="0" y="0"/>
-          <a:ext cx="0" cy="0"/>
-          <a:chOff x="0" y="0"/>
-          <a:chExt cx="0" cy="0"/>
-        </a:xfrm>
-      </p:grpSpPr>
-      <p:sp>
-        <p:nvSpPr>
-          <p:cNvPr id="8" name="CuadroTexto 7">
-            <a:extLst>
-              <a:ext uri="{FF2B5EF4-FFF2-40B4-BE49-F238E27FC236}">
-                <a16:creationId xmlns:a16="http://schemas.microsoft.com/office/drawing/2014/main" id="{F0AED95D-00EA-CC3A-DBC4-6C4B48A78E7A}"/>
-              </a:ext>
-            </a:extLst>
-          </p:cNvPr>
-          <p:cNvSpPr txBox="1">
-            <a:spLocks noGrp="1" noRot="1" noMove="1" noResize="1" noEditPoints="1" noAdjustHandles="1" noChangeArrowheads="1" noChangeShapeType="1"/>
-          </p:cNvSpPr>
-          <p:nvPr/>
-        </p:nvSpPr>
-        <p:spPr>
-          <a:xfrm>
-            <a:off x="1828800" y="0"/>
-            <a:ext cx="5486400" cy="523220"/>
-          </a:xfrm>
-          <a:prstGeom prst="rect">
-            <a:avLst/>
-          </a:prstGeom>
-          <a:noFill/>
-        </p:spPr>
-        <p:txBody>
-          <a:bodyPr wrap="square" rtlCol="0">
-            <a:spAutoFit/>
-          </a:bodyPr>
-          <a:lstStyle/>
-          <a:p>
-            <a:pPr algn="ctr"/>
-            <a:r>
-              <a:rPr lang="es-MX" sz="2800" b="1" dirty="0">
-                <a:latin typeface="Montserrat" pitchFamily="2" charset="0"/>
-              </a:rPr>
-              <a:t>Gobernador</a:t>
-            </a:r>
-          </a:p>
-        </p:txBody>
-      </p:sp>
-      <p:pic>
-        <p:nvPicPr>
-          <p:cNvPr id="3" name="Imagen 2">
-            <a:extLst>
-              <a:ext uri="{FF2B5EF4-FFF2-40B4-BE49-F238E27FC236}">
-                <a16:creationId xmlns:a16="http://schemas.microsoft.com/office/drawing/2014/main" id="{620B718C-2662-D93B-50CB-62D9A4DB2EC2}"/>
-              </a:ext>
-            </a:extLst>
-          </p:cNvPr>
-          <p:cNvPicPr>
-            <a:picLocks noChangeAspect="1"/>
-          </p:cNvPicPr>
-          <p:nvPr/>
-        </p:nvPicPr>
-        <p:blipFill>
-          <a:blip r:embed="rId2"/>
-          <a:stretch>
-            <a:fillRect/>
-          </a:stretch>
-        </p:blipFill>
-        <p:spPr>
-          <a:xfrm>
-            <a:off x="803167" y="762064"/>
-            <a:ext cx="7464642" cy="3762248"/>
-          </a:xfrm>
-          <a:prstGeom prst="rect">
-            <a:avLst/>
-          </a:prstGeom>
-        </p:spPr>
-      </p:pic>
-    </p:spTree>
-    <p:extLst>
-      <p:ext uri="{BB962C8B-B14F-4D97-AF65-F5344CB8AC3E}">
-        <p14:creationId xmlns:p14="http://schemas.microsoft.com/office/powerpoint/2010/main" val="3847443195"/>
-      </p:ext>
-    </p:extLst>
-  </p:cSld>
-  <p:clrMapOvr>
-    <a:masterClrMapping/>
-  </p:clrMapOvr>
-</p:sld>
-</file>
-
-<file path=ppt/slides/slide9.xml><?xml version="1.0" encoding="utf-8"?>
 <p:sld xmlns:a="http://schemas.openxmlformats.org/drawingml/2006/main" xmlns:r="http://schemas.openxmlformats.org/officeDocument/2006/relationships" xmlns:p="http://schemas.openxmlformats.org/presentationml/2006/main">
   <p:cSld>
     <p:spTree>
@@ -7730,10 +7541,10 @@
       </p:sp>
       <p:pic>
         <p:nvPicPr>
-          <p:cNvPr id="3" name="Imagen 2">
+          <p:cNvPr id="4" name="Imagen 3">
             <a:extLst>
               <a:ext uri="{FF2B5EF4-FFF2-40B4-BE49-F238E27FC236}">
-                <a16:creationId xmlns:a16="http://schemas.microsoft.com/office/drawing/2014/main" id="{0D2F32EE-E7B0-6751-FA22-7D8C0CD4A4D1}"/>
+                <a16:creationId xmlns:a16="http://schemas.microsoft.com/office/drawing/2014/main" id="{23934BDE-9540-D708-9943-5ABC2AC912C3}"/>
               </a:ext>
             </a:extLst>
           </p:cNvPr>
@@ -7750,8 +7561,8 @@
         </p:blipFill>
         <p:spPr>
           <a:xfrm>
-            <a:off x="594757" y="1728670"/>
-            <a:ext cx="7954485" cy="1686160"/>
+            <a:off x="0" y="1098834"/>
+            <a:ext cx="9144000" cy="2945832"/>
           </a:xfrm>
           <a:prstGeom prst="rect">
             <a:avLst/>
@@ -7762,6 +7573,110 @@
     <p:extLst>
       <p:ext uri="{BB962C8B-B14F-4D97-AF65-F5344CB8AC3E}">
         <p14:creationId xmlns:p14="http://schemas.microsoft.com/office/powerpoint/2010/main" val="1107487412"/>
+      </p:ext>
+    </p:extLst>
+  </p:cSld>
+  <p:clrMapOvr>
+    <a:masterClrMapping/>
+  </p:clrMapOvr>
+</p:sld>
+</file>
+
+<file path=ppt/slides/slide9.xml><?xml version="1.0" encoding="utf-8"?>
+<p:sld xmlns:a="http://schemas.openxmlformats.org/drawingml/2006/main" xmlns:r="http://schemas.openxmlformats.org/officeDocument/2006/relationships" xmlns:p="http://schemas.openxmlformats.org/presentationml/2006/main">
+  <p:cSld>
+    <p:spTree>
+      <p:nvGrpSpPr>
+        <p:cNvPr id="1" name="Shape 108">
+          <a:extLst>
+            <a:ext uri="{FF2B5EF4-FFF2-40B4-BE49-F238E27FC236}">
+              <a16:creationId xmlns:a16="http://schemas.microsoft.com/office/drawing/2014/main" id="{3AB59246-6522-404E-9FEB-F1E85E07D6CC}"/>
+            </a:ext>
+          </a:extLst>
+        </p:cNvPr>
+        <p:cNvGrpSpPr/>
+        <p:nvPr/>
+      </p:nvGrpSpPr>
+      <p:grpSpPr>
+        <a:xfrm>
+          <a:off x="0" y="0"/>
+          <a:ext cx="0" cy="0"/>
+          <a:chOff x="0" y="0"/>
+          <a:chExt cx="0" cy="0"/>
+        </a:xfrm>
+      </p:grpSpPr>
+      <p:sp>
+        <p:nvSpPr>
+          <p:cNvPr id="2" name="CuadroTexto 1">
+            <a:extLst>
+              <a:ext uri="{FF2B5EF4-FFF2-40B4-BE49-F238E27FC236}">
+                <a16:creationId xmlns:a16="http://schemas.microsoft.com/office/drawing/2014/main" id="{AE07F171-51E8-E8F4-27C7-0CA3B7A8A997}"/>
+              </a:ext>
+            </a:extLst>
+          </p:cNvPr>
+          <p:cNvSpPr txBox="1"/>
+          <p:nvPr/>
+        </p:nvSpPr>
+        <p:spPr>
+          <a:xfrm>
+            <a:off x="1183340" y="0"/>
+            <a:ext cx="6763871" cy="369332"/>
+          </a:xfrm>
+          <a:prstGeom prst="rect">
+            <a:avLst/>
+          </a:prstGeom>
+          <a:noFill/>
+        </p:spPr>
+        <p:txBody>
+          <a:bodyPr wrap="square" rtlCol="0">
+            <a:spAutoFit/>
+          </a:bodyPr>
+          <a:lstStyle/>
+          <a:p>
+            <a:pPr algn="ctr"/>
+            <a:r>
+              <a:rPr lang="es-MX" sz="1800" b="1" dirty="0">
+                <a:latin typeface="Montserrat" panose="00000500000000000000" pitchFamily="2" charset="0"/>
+              </a:rPr>
+              <a:t>Información de gobierno en radiodifusoras</a:t>
+            </a:r>
+          </a:p>
+        </p:txBody>
+      </p:sp>
+      <p:pic>
+        <p:nvPicPr>
+          <p:cNvPr id="4" name="Imagen 3">
+            <a:extLst>
+              <a:ext uri="{FF2B5EF4-FFF2-40B4-BE49-F238E27FC236}">
+                <a16:creationId xmlns:a16="http://schemas.microsoft.com/office/drawing/2014/main" id="{4BDC7DC0-257C-2933-2506-71554730999B}"/>
+              </a:ext>
+            </a:extLst>
+          </p:cNvPr>
+          <p:cNvPicPr>
+            <a:picLocks noChangeAspect="1"/>
+          </p:cNvPicPr>
+          <p:nvPr/>
+        </p:nvPicPr>
+        <p:blipFill>
+          <a:blip r:embed="rId3"/>
+          <a:stretch>
+            <a:fillRect/>
+          </a:stretch>
+        </p:blipFill>
+        <p:spPr>
+          <a:xfrm>
+            <a:off x="0" y="827402"/>
+            <a:ext cx="9144000" cy="3488695"/>
+          </a:xfrm>
+          <a:prstGeom prst="rect">
+            <a:avLst/>
+          </a:prstGeom>
+        </p:spPr>
+      </p:pic>
+    </p:spTree>
+    <p:extLst>
+      <p:ext uri="{BB962C8B-B14F-4D97-AF65-F5344CB8AC3E}">
+        <p14:creationId xmlns:p14="http://schemas.microsoft.com/office/powerpoint/2010/main" val="3295811942"/>
       </p:ext>
     </p:extLst>
   </p:cSld>
